--- a/Archimedes_AI_Presentation.pptx
+++ b/Archimedes_AI_Presentation.pptx
@@ -36873,7 +36873,7 @@
           </a:lstStyle>
           <a:p>
             <a:r>
-              <a:t>SAP Enterprise Architecture</a:t>
+              <a:t>SAP Advisory Architecture</a:t>
             </a:r>
           </a:p>
         </p:txBody>
